--- a/docs/factorio_user_guide_2026-07-26_ru.pptx
+++ b/docs/factorio_user_guide_2026-07-26_ru.pptx
@@ -5162,7 +5162,7 @@
                   <a:srgbClr val="14231B"/>
                 </a:solidFill>
               </a:rPr>
-              <a:t>•  Загрузите счёт в PDF, PNG, JPEG, JSON или текстовом формате; для безопасной демонстрации включены три синтетических PDF.</a:t>
+              <a:t>•  Factorio AI — основное рабочее место поставщика: счёт PDF, изображение, JSON или текст прикрепляется скрепкой в чате.</a:t>
             </a:r>
           </a:p>
           <a:p>
@@ -5177,7 +5177,7 @@
                   <a:srgbClr val="14231B"/>
                 </a:solidFill>
               </a:rPr>
-              <a:t>•  Цифровые PDF локально преобразуются в Markdown; более медленное xAI-зрение используется только для сканов. Grok извлекает стороны, даты, сумму/валюту, PO, налоговые и банковские данные.</a:t>
+              <a:t>•  Цифровые PDF преобразуются в Markdown локально; xAI-зрение используется только для сканов.</a:t>
             </a:r>
           </a:p>
           <a:p>
@@ -5192,7 +5192,7 @@
                   <a:srgbClr val="14231B"/>
                 </a:solidFill>
               </a:rPr>
-              <a:t>•  Результат содержит уровень уверенности, доказательства и замечания; перед отправкой поставщик проверяет редактируемый JSON.</a:t>
+              <a:t>•  В чате показаны стоимость счёта, процент и сумма выплаты сегодня, срок и месячная стоимость; выписка или Open Banking необязательны.</a:t>
             </a:r>
           </a:p>
           <a:p>
@@ -5207,7 +5207,7 @@
                   <a:srgbClr val="14231B"/>
                 </a:solidFill>
               </a:rPr>
-              <a:t>•  Отправка атомарно создаёт счёт и открытую заявку на финансирование в маркетплейсе с запрошенной или стандартной ставкой аванса.</a:t>
+              <a:t>•  Принятие оферты создаёт заявку и одностраничный синтетический договор Factorio Ltd с извлечённым поставщиком.</a:t>
             </a:r>
           </a:p>
         </p:txBody>
